--- a/media/exports/reports/2026-07/people-helped.pptx
+++ b/media/exports/reports/2026-07/people-helped.pptx
@@ -190,19 +190,19 @@
               <c:strCache>
                 <c:ptCount val="5"/>
                 <c:pt idx="0">
+                  <c:v>Digital literacy</c:v>
+                </c:pt>
+                <c:pt idx="1">
                   <c:v>Mental health first aid</c:v>
                 </c:pt>
-                <c:pt idx="1">
-                  <c:v>Youth outreach</c:v>
-                </c:pt>
                 <c:pt idx="2">
-                  <c:v>Digital literacy</c:v>
+                  <c:v>Housing support</c:v>
                 </c:pt>
                 <c:pt idx="3">
-                  <c:v>Housing support</c:v>
+                  <c:v>Community meals</c:v>
                 </c:pt>
                 <c:pt idx="4">
-                  <c:v>Community meals</c:v>
+                  <c:v>Youth outreach</c:v>
                 </c:pt>
               </c:strCache>
             </c:strRef>
@@ -214,19 +214,19 @@
                 <c:formatCode>0.0"%";[Red](0.0"%")</c:formatCode>
                 <c:ptCount val="5"/>
                 <c:pt idx="0">
-                  <c:v>79.5</c:v>
+                  <c:v>82.3</c:v>
                 </c:pt>
                 <c:pt idx="1">
-                  <c:v>80.3</c:v>
+                  <c:v>83.8</c:v>
                 </c:pt>
                 <c:pt idx="2">
-                  <c:v>83.6</c:v>
+                  <c:v>83.9</c:v>
                 </c:pt>
                 <c:pt idx="3">
-                  <c:v>83.9</c:v>
+                  <c:v>84.1</c:v>
                 </c:pt>
                 <c:pt idx="4">
-                  <c:v>88.2</c:v>
+                  <c:v>85.1</c:v>
                 </c:pt>
               </c:numCache>
             </c:numRef>
@@ -1087,7 +1087,7 @@
           <a:lstStyle/>
           <a:p>
             <a:r>
-              <a:t>How many people did we help this month, and how many couldn't we reach?. People helped, July: 497; Couldn't reach, July: 97; Share reached, July: 83.7%. 497 people were helped in July, and 97 came to a program but couldn't be helped: 83.7% reached (target 90.0%), against 82.8% in June. Mental health first aid reached the smallest share: 79.5% (16 couldn't be helped). The main reason: program at capacity (37 people).</a:t>
+              <a:t>How many people did we help this month, and how many couldn't we reach?. People helped, July: 497; Couldn't reach, July: 94; Share reached, July: 84.1%. 497 people were helped in July, and 94 came to a program but couldn't be helped: 84.1% reached (target 90.0%), against 83.8% in June. Digital literacy reached the smallest share: 82.3% (11 couldn't be helped). The main reason: program at capacity (33 people).</a:t>
             </a:r>
           </a:p>
         </p:txBody>
@@ -4642,7 +4642,7 @@
                 </a:solidFill>
                 <a:latin typeface="Roboto"/>
               </a:rPr>
-              <a:t>Data retrieved 2pm, Tue 6 Oct 2026 · Generated 8 Oct 2026, 6:29pm · Sample data · Made with Python (python-pptx)</a:t>
+              <a:t>Data retrieved 2pm, Tue 6 Oct 2026 · Generated 8 Oct 2026, 11:41pm · Sample data · Made with Python (python-pptx)</a:t>
             </a:r>
           </a:p>
         </p:txBody>
@@ -5154,7 +5154,7 @@
                 </a:solidFill>
                 <a:latin typeface="Roboto"/>
               </a:rPr>
-              <a:t>97</a:t>
+              <a:t>94</a:t>
             </a:r>
           </a:p>
         </p:txBody>
@@ -5193,7 +5193,7 @@
                 </a:solidFill>
                 <a:latin typeface="Roboto"/>
               </a:rPr>
-              <a:t>June 102</a:t>
+              <a:t>June 95</a:t>
             </a:r>
           </a:p>
         </p:txBody>
@@ -5320,7 +5320,7 @@
                 </a:solidFill>
                 <a:latin typeface="Roboto"/>
               </a:rPr>
-              <a:t>83.7%</a:t>
+              <a:t>84.1%</a:t>
             </a:r>
           </a:p>
         </p:txBody>
@@ -5579,7 +5579,7 @@
                 </a:solidFill>
                 <a:latin typeface="Roboto"/>
               </a:rPr>
-              <a:t>497 people were helped in July, and 97 came to a program but couldn't be helped: 83.7% reached (target 90.0%), against 82.8% in June.</a:t>
+              <a:t>497 people were helped in July, and 94 came to a program but couldn't be helped: 84.1% reached (target 90.0%), against 83.8% in June.</a:t>
             </a:r>
           </a:p>
         </p:txBody>
@@ -5706,7 +5706,7 @@
                 </a:solidFill>
                 <a:latin typeface="Roboto"/>
               </a:rPr>
-              <a:t>Mental health first aid reached the smallest share: 79.5% (16 couldn't be helped). The main reason: program at capacity (37 people).</a:t>
+              <a:t>Digital literacy reached the smallest share: 82.3% (11 couldn't be helped). The main reason: program at capacity (33 people).</a:t>
             </a:r>
           </a:p>
         </p:txBody>
@@ -5784,7 +5784,7 @@
                 </a:solidFill>
                 <a:latin typeface="Roboto"/>
               </a:rPr>
-              <a:t>Data retrieved 2pm, Tue 6 Oct 2026 · Generated 8 Oct 2026, 6:29pm · Sample data · Made with Python (python-pptx)</a:t>
+              <a:t>Data retrieved 2pm, Tue 6 Oct 2026 · Generated 8 Oct 2026, 11:41pm · Sample data · Made with Python (python-pptx)</a:t>
             </a:r>
           </a:p>
         </p:txBody>
@@ -6099,7 +6099,7 @@
                 </a:solidFill>
                 <a:latin typeface="Roboto"/>
               </a:rPr>
-              <a:t>Data retrieved 2pm, Tue 6 Oct 2026 · Generated 8 Oct 2026, 6:29pm · Sample data · Made with Python (python-pptx)</a:t>
+              <a:t>Data retrieved 2pm, Tue 6 Oct 2026 · Generated 8 Oct 2026, 11:41pm · Sample data · Made with Python (python-pptx)</a:t>
             </a:r>
           </a:p>
         </p:txBody>
@@ -6407,7 +6407,7 @@
                           </a:solidFill>
                           <a:latin typeface="Roboto"/>
                         </a:rPr>
-                        <a:t>37</a:t>
+                        <a:t>33</a:t>
                       </a:r>
                     </a:p>
                   </a:txBody>
@@ -6463,7 +6463,7 @@
                           </a:solidFill>
                           <a:latin typeface="Roboto"/>
                         </a:rPr>
-                        <a:t>30</a:t>
+                        <a:t>31</a:t>
                       </a:r>
                     </a:p>
                   </a:txBody>
@@ -6519,7 +6519,7 @@
                           </a:solidFill>
                           <a:latin typeface="Roboto"/>
                         </a:rPr>
-                        <a:t>15</a:t>
+                        <a:t>12</a:t>
                       </a:r>
                     </a:p>
                   </a:txBody>
@@ -6548,7 +6548,7 @@
                           </a:solidFill>
                           <a:latin typeface="Roboto"/>
                         </a:rPr>
-                        <a:t>Not eligible</a:t>
+                        <a:t>Outside the service area</a:t>
                       </a:r>
                     </a:p>
                   </a:txBody>
@@ -6575,7 +6575,7 @@
                           </a:solidFill>
                           <a:latin typeface="Roboto"/>
                         </a:rPr>
-                        <a:t>8</a:t>
+                        <a:t>11</a:t>
                       </a:r>
                     </a:p>
                   </a:txBody>
@@ -6604,7 +6604,7 @@
                           </a:solidFill>
                           <a:latin typeface="Roboto"/>
                         </a:rPr>
-                        <a:t>Outside the service area</a:t>
+                        <a:t>Not eligible</a:t>
                       </a:r>
                     </a:p>
                   </a:txBody>
@@ -6719,7 +6719,7 @@
                 </a:solidFill>
                 <a:latin typeface="Roboto"/>
               </a:rPr>
-              <a:t>Data retrieved 2pm, Tue 6 Oct 2026 · Generated 8 Oct 2026, 6:29pm · Sample data · Made with Python (python-pptx)</a:t>
+              <a:t>Data retrieved 2pm, Tue 6 Oct 2026 · Generated 8 Oct 2026, 11:41pm · Sample data · Made with Python (python-pptx)</a:t>
             </a:r>
           </a:p>
         </p:txBody>

--- a/media/exports/reports/2026-07/people-helped.pptx
+++ b/media/exports/reports/2026-07/people-helped.pptx
@@ -1017,7 +1017,7 @@
           <a:lstStyle/>
           <a:p>
             <a:r>
-              <a:t>How many people did we help this month, and how many couldn't we reach?. Sample Community Services Ltd. Period: July 2026. People helped by each program, day by day, and the people who came to a program but couldn't be helped (and why). People helped are counted against each program's own grant spend.</a:t>
+              <a:t>How many people did we help this month, and how many couldn't we reach?. Sample Community Services Ltd. Period: July 2026. In short: 497 people helped in July; 94 couldn't be reached (84.1% reached, target 90.0%). People helped by each program, day by day, and the people who came to a program but couldn't be helped (and why). People helped are counted against each program's own grant spend.</a:t>
             </a:r>
           </a:p>
         </p:txBody>
@@ -4452,7 +4452,7 @@
         <p:spPr>
           <a:xfrm>
             <a:off x="457200" y="3703320"/>
-            <a:ext cx="11277295" cy="535940"/>
+            <a:ext cx="11277295" cy="758190"/>
           </a:xfrm>
           <a:prstGeom prst="rect">
             <a:avLst/>
@@ -4477,7 +4477,7 @@
                 </a:solidFill>
                 <a:latin typeface="Roboto"/>
               </a:rPr>
-              <a:t>Period: July 2026. People helped by each program, day by day, and the people who came to a program but couldn't be helped (and why). People helped are counted against each program's own grant spend.</a:t>
+              <a:t>Period: July 2026. In short: 497 people helped in July; 94 couldn't be reached (84.1% reached, target 90.0%). People helped by each program, day by day, and the people who came to a program but couldn't be helped (and why). People helped are counted against each program's own grant spend.</a:t>
             </a:r>
           </a:p>
         </p:txBody>
@@ -4490,7 +4490,7 @@
         </p:nvSpPr>
         <p:spPr>
           <a:xfrm>
-            <a:off x="457200" y="4330700"/>
+            <a:off x="457200" y="4552950"/>
             <a:ext cx="11277295" cy="1097280"/>
           </a:xfrm>
           <a:prstGeom prst="rect">
@@ -4642,7 +4642,7 @@
                 </a:solidFill>
                 <a:latin typeface="Roboto"/>
               </a:rPr>
-              <a:t>Data retrieved 2pm, Tue 6 Oct 2026 · Generated 8 Oct 2026, 11:41pm · Sample data · Made with Python (python-pptx)</a:t>
+              <a:t>Data retrieved 2pm, Tue 6 Oct 2026 · Generated 10 Oct 2026, 9:55pm · Sample data · Made with Python (python-pptx)</a:t>
             </a:r>
           </a:p>
         </p:txBody>
@@ -5784,7 +5784,7 @@
                 </a:solidFill>
                 <a:latin typeface="Roboto"/>
               </a:rPr>
-              <a:t>Data retrieved 2pm, Tue 6 Oct 2026 · Generated 8 Oct 2026, 11:41pm · Sample data · Made with Python (python-pptx)</a:t>
+              <a:t>Data retrieved 2pm, Tue 6 Oct 2026 · Generated 10 Oct 2026, 9:55pm · Sample data · Made with Python (python-pptx)</a:t>
             </a:r>
           </a:p>
         </p:txBody>
@@ -6099,7 +6099,7 @@
                 </a:solidFill>
                 <a:latin typeface="Roboto"/>
               </a:rPr>
-              <a:t>Data retrieved 2pm, Tue 6 Oct 2026 · Generated 8 Oct 2026, 11:41pm · Sample data · Made with Python (python-pptx)</a:t>
+              <a:t>Data retrieved 2pm, Tue 6 Oct 2026 · Generated 10 Oct 2026, 9:55pm · Sample data · Made with Python (python-pptx)</a:t>
             </a:r>
           </a:p>
         </p:txBody>
@@ -6719,7 +6719,7 @@
                 </a:solidFill>
                 <a:latin typeface="Roboto"/>
               </a:rPr>
-              <a:t>Data retrieved 2pm, Tue 6 Oct 2026 · Generated 8 Oct 2026, 11:41pm · Sample data · Made with Python (python-pptx)</a:t>
+              <a:t>Data retrieved 2pm, Tue 6 Oct 2026 · Generated 10 Oct 2026, 9:55pm · Sample data · Made with Python (python-pptx)</a:t>
             </a:r>
           </a:p>
         </p:txBody>
